--- a/docs/agent-bypass-tradeoffs.pptx
+++ b/docs/agent-bypass-tradeoffs.pptx
@@ -5,15 +5,15 @@
     <p:sldMasterId id="2147483648" r:id="rId1"/>
   </p:sldMasterIdLst>
   <p:sldIdLst>
-    <p:sldId id="256" r:id="rId7"/>
-    <p:sldId id="257" r:id="rId8"/>
-    <p:sldId id="258" r:id="rId9"/>
-    <p:sldId id="259" r:id="rId10"/>
-    <p:sldId id="260" r:id="rId11"/>
-    <p:sldId id="261" r:id="rId12"/>
-    <p:sldId id="262" r:id="rId13"/>
+    <p:sldId id="256" r:id="rId2"/>
+    <p:sldId id="257" r:id="rId3"/>
+    <p:sldId id="258" r:id="rId4"/>
+    <p:sldId id="259" r:id="rId5"/>
+    <p:sldId id="260" r:id="rId6"/>
+    <p:sldId id="261" r:id="rId7"/>
+    <p:sldId id="262" r:id="rId8"/>
   </p:sldIdLst>
-  <p:sldSz cx="12191695" cy="6858000" type="screen4x3"/>
+  <p:sldSz cx="12192000" cy="6858000"/>
   <p:notesSz cx="6858000" cy="9144000"/>
   <p:defaultTextStyle>
     <a:defPPr>
@@ -110,6 +110,22 @@
       </a:defRPr>
     </a:lvl9pPr>
   </p:defaultTextStyle>
+  <p:extLst>
+    <p:ext uri="{EFAFB233-063F-42B5-8137-9DF3F51BA10A}">
+      <p15:sldGuideLst xmlns:p15="http://schemas.microsoft.com/office/powerpoint/2012/main">
+        <p15:guide id="1" orient="horz" pos="2160">
+          <p15:clr>
+            <a:srgbClr val="A4A3A4"/>
+          </p15:clr>
+        </p15:guide>
+        <p15:guide id="2" pos="2880">
+          <p15:clr>
+            <a:srgbClr val="A4A3A4"/>
+          </p15:clr>
+        </p15:guide>
+      </p15:sldGuideLst>
+    </p:ext>
+  </p:extLst>
 </p:presentation>
 </file>
 
@@ -151,10 +167,9 @@
           <a:lstStyle/>
           <a:p>
             <a:r>
-              <a:rPr lang="en-US" smtClean="0"/>
+              <a:rPr lang="en-US"/>
               <a:t>Click to edit Master title style</a:t>
             </a:r>
-            <a:endParaRPr lang="en-US"/>
           </a:p>
         </p:txBody>
       </p:sp>
@@ -270,10 +285,9 @@
           </a:lstStyle>
           <a:p>
             <a:r>
-              <a:rPr lang="en-US" smtClean="0"/>
+              <a:rPr lang="en-US"/>
               <a:t>Click to edit Master subtitle style</a:t>
             </a:r>
-            <a:endParaRPr lang="en-US"/>
           </a:p>
         </p:txBody>
       </p:sp>
@@ -294,7 +308,7 @@
           <a:p>
             <a:fld id="{5BCAD085-E8A6-8845-BD4E-CB4CCA059FC4}" type="datetimeFigureOut">
               <a:rPr lang="en-US" smtClean="0"/>
-              <a:t>1/27/13</a:t>
+              <a:t>8/30/2026</a:t>
             </a:fld>
             <a:endParaRPr lang="en-US"/>
           </a:p>
@@ -388,10 +402,9 @@
           <a:lstStyle/>
           <a:p>
             <a:r>
-              <a:rPr lang="en-US" smtClean="0"/>
+              <a:rPr lang="en-US"/>
               <a:t>Click to edit Master title style</a:t>
             </a:r>
-            <a:endParaRPr lang="en-US"/>
           </a:p>
         </p:txBody>
       </p:sp>
@@ -412,38 +425,37 @@
           <a:p>
             <a:pPr lvl="0"/>
             <a:r>
-              <a:rPr lang="en-US" smtClean="0"/>
+              <a:rPr lang="en-US"/>
               <a:t>Click to edit Master text styles</a:t>
             </a:r>
           </a:p>
           <a:p>
             <a:pPr lvl="1"/>
             <a:r>
-              <a:rPr lang="en-US" smtClean="0"/>
+              <a:rPr lang="en-US"/>
               <a:t>Second level</a:t>
             </a:r>
           </a:p>
           <a:p>
             <a:pPr lvl="2"/>
             <a:r>
-              <a:rPr lang="en-US" smtClean="0"/>
+              <a:rPr lang="en-US"/>
               <a:t>Third level</a:t>
             </a:r>
           </a:p>
           <a:p>
             <a:pPr lvl="3"/>
             <a:r>
-              <a:rPr lang="en-US" smtClean="0"/>
+              <a:rPr lang="en-US"/>
               <a:t>Fourth level</a:t>
             </a:r>
           </a:p>
           <a:p>
             <a:pPr lvl="4"/>
             <a:r>
-              <a:rPr lang="en-US" smtClean="0"/>
+              <a:rPr lang="en-US"/>
               <a:t>Fifth level</a:t>
             </a:r>
-            <a:endParaRPr lang="en-US"/>
           </a:p>
         </p:txBody>
       </p:sp>
@@ -464,7 +476,7 @@
           <a:p>
             <a:fld id="{5BCAD085-E8A6-8845-BD4E-CB4CCA059FC4}" type="datetimeFigureOut">
               <a:rPr lang="en-US" smtClean="0"/>
-              <a:t>1/27/13</a:t>
+              <a:t>8/30/2026</a:t>
             </a:fld>
             <a:endParaRPr lang="en-US"/>
           </a:p>
@@ -563,10 +575,9 @@
           <a:lstStyle/>
           <a:p>
             <a:r>
-              <a:rPr lang="en-US" smtClean="0"/>
+              <a:rPr lang="en-US"/>
               <a:t>Click to edit Master title style</a:t>
             </a:r>
-            <a:endParaRPr lang="en-US"/>
           </a:p>
         </p:txBody>
       </p:sp>
@@ -592,38 +603,37 @@
           <a:p>
             <a:pPr lvl="0"/>
             <a:r>
-              <a:rPr lang="en-US" smtClean="0"/>
+              <a:rPr lang="en-US"/>
               <a:t>Click to edit Master text styles</a:t>
             </a:r>
           </a:p>
           <a:p>
             <a:pPr lvl="1"/>
             <a:r>
-              <a:rPr lang="en-US" smtClean="0"/>
+              <a:rPr lang="en-US"/>
               <a:t>Second level</a:t>
             </a:r>
           </a:p>
           <a:p>
             <a:pPr lvl="2"/>
             <a:r>
-              <a:rPr lang="en-US" smtClean="0"/>
+              <a:rPr lang="en-US"/>
               <a:t>Third level</a:t>
             </a:r>
           </a:p>
           <a:p>
             <a:pPr lvl="3"/>
             <a:r>
-              <a:rPr lang="en-US" smtClean="0"/>
+              <a:rPr lang="en-US"/>
               <a:t>Fourth level</a:t>
             </a:r>
           </a:p>
           <a:p>
             <a:pPr lvl="4"/>
             <a:r>
-              <a:rPr lang="en-US" smtClean="0"/>
+              <a:rPr lang="en-US"/>
               <a:t>Fifth level</a:t>
             </a:r>
-            <a:endParaRPr lang="en-US"/>
           </a:p>
         </p:txBody>
       </p:sp>
@@ -644,7 +654,7 @@
           <a:p>
             <a:fld id="{5BCAD085-E8A6-8845-BD4E-CB4CCA059FC4}" type="datetimeFigureOut">
               <a:rPr lang="en-US" smtClean="0"/>
-              <a:t>1/27/13</a:t>
+              <a:t>8/30/2026</a:t>
             </a:fld>
             <a:endParaRPr lang="en-US"/>
           </a:p>
@@ -738,10 +748,9 @@
           <a:lstStyle/>
           <a:p>
             <a:r>
-              <a:rPr lang="en-US" smtClean="0"/>
+              <a:rPr lang="en-US"/>
               <a:t>Click to edit Master title style</a:t>
             </a:r>
-            <a:endParaRPr lang="en-US"/>
           </a:p>
         </p:txBody>
       </p:sp>
@@ -762,38 +771,37 @@
           <a:p>
             <a:pPr lvl="0"/>
             <a:r>
-              <a:rPr lang="en-US" smtClean="0"/>
+              <a:rPr lang="en-US"/>
               <a:t>Click to edit Master text styles</a:t>
             </a:r>
           </a:p>
           <a:p>
             <a:pPr lvl="1"/>
             <a:r>
-              <a:rPr lang="en-US" smtClean="0"/>
+              <a:rPr lang="en-US"/>
               <a:t>Second level</a:t>
             </a:r>
           </a:p>
           <a:p>
             <a:pPr lvl="2"/>
             <a:r>
-              <a:rPr lang="en-US" smtClean="0"/>
+              <a:rPr lang="en-US"/>
               <a:t>Third level</a:t>
             </a:r>
           </a:p>
           <a:p>
             <a:pPr lvl="3"/>
             <a:r>
-              <a:rPr lang="en-US" smtClean="0"/>
+              <a:rPr lang="en-US"/>
               <a:t>Fourth level</a:t>
             </a:r>
           </a:p>
           <a:p>
             <a:pPr lvl="4"/>
             <a:r>
-              <a:rPr lang="en-US" smtClean="0"/>
+              <a:rPr lang="en-US"/>
               <a:t>Fifth level</a:t>
             </a:r>
-            <a:endParaRPr lang="en-US"/>
           </a:p>
         </p:txBody>
       </p:sp>
@@ -814,7 +822,7 @@
           <a:p>
             <a:fld id="{5BCAD085-E8A6-8845-BD4E-CB4CCA059FC4}" type="datetimeFigureOut">
               <a:rPr lang="en-US" smtClean="0"/>
-              <a:t>1/27/13</a:t>
+              <a:t>8/30/2026</a:t>
             </a:fld>
             <a:endParaRPr lang="en-US"/>
           </a:p>
@@ -917,10 +925,9 @@
           </a:lstStyle>
           <a:p>
             <a:r>
-              <a:rPr lang="en-US" smtClean="0"/>
+              <a:rPr lang="en-US"/>
               <a:t>Click to edit Master title style</a:t>
             </a:r>
-            <a:endParaRPr lang="en-US"/>
           </a:p>
         </p:txBody>
       </p:sp>
@@ -1037,7 +1044,7 @@
           <a:p>
             <a:pPr lvl="0"/>
             <a:r>
-              <a:rPr lang="en-US" smtClean="0"/>
+              <a:rPr lang="en-US"/>
               <a:t>Click to edit Master text styles</a:t>
             </a:r>
           </a:p>
@@ -1060,7 +1067,7 @@
           <a:p>
             <a:fld id="{5BCAD085-E8A6-8845-BD4E-CB4CCA059FC4}" type="datetimeFigureOut">
               <a:rPr lang="en-US" smtClean="0"/>
-              <a:t>1/27/13</a:t>
+              <a:t>8/30/2026</a:t>
             </a:fld>
             <a:endParaRPr lang="en-US"/>
           </a:p>
@@ -1154,10 +1161,9 @@
           <a:lstStyle/>
           <a:p>
             <a:r>
-              <a:rPr lang="en-US" smtClean="0"/>
+              <a:rPr lang="en-US"/>
               <a:t>Click to edit Master title style</a:t>
             </a:r>
-            <a:endParaRPr lang="en-US"/>
           </a:p>
         </p:txBody>
       </p:sp>
@@ -1211,38 +1217,37 @@
           <a:p>
             <a:pPr lvl="0"/>
             <a:r>
-              <a:rPr lang="en-US" smtClean="0"/>
+              <a:rPr lang="en-US"/>
               <a:t>Click to edit Master text styles</a:t>
             </a:r>
           </a:p>
           <a:p>
             <a:pPr lvl="1"/>
             <a:r>
-              <a:rPr lang="en-US" smtClean="0"/>
+              <a:rPr lang="en-US"/>
               <a:t>Second level</a:t>
             </a:r>
           </a:p>
           <a:p>
             <a:pPr lvl="2"/>
             <a:r>
-              <a:rPr lang="en-US" smtClean="0"/>
+              <a:rPr lang="en-US"/>
               <a:t>Third level</a:t>
             </a:r>
           </a:p>
           <a:p>
             <a:pPr lvl="3"/>
             <a:r>
-              <a:rPr lang="en-US" smtClean="0"/>
+              <a:rPr lang="en-US"/>
               <a:t>Fourth level</a:t>
             </a:r>
           </a:p>
           <a:p>
             <a:pPr lvl="4"/>
             <a:r>
-              <a:rPr lang="en-US" smtClean="0"/>
+              <a:rPr lang="en-US"/>
               <a:t>Fifth level</a:t>
             </a:r>
-            <a:endParaRPr lang="en-US"/>
           </a:p>
         </p:txBody>
       </p:sp>
@@ -1296,38 +1301,37 @@
           <a:p>
             <a:pPr lvl="0"/>
             <a:r>
-              <a:rPr lang="en-US" smtClean="0"/>
+              <a:rPr lang="en-US"/>
               <a:t>Click to edit Master text styles</a:t>
             </a:r>
           </a:p>
           <a:p>
             <a:pPr lvl="1"/>
             <a:r>
-              <a:rPr lang="en-US" smtClean="0"/>
+              <a:rPr lang="en-US"/>
               <a:t>Second level</a:t>
             </a:r>
           </a:p>
           <a:p>
             <a:pPr lvl="2"/>
             <a:r>
-              <a:rPr lang="en-US" smtClean="0"/>
+              <a:rPr lang="en-US"/>
               <a:t>Third level</a:t>
             </a:r>
           </a:p>
           <a:p>
             <a:pPr lvl="3"/>
             <a:r>
-              <a:rPr lang="en-US" smtClean="0"/>
+              <a:rPr lang="en-US"/>
               <a:t>Fourth level</a:t>
             </a:r>
           </a:p>
           <a:p>
             <a:pPr lvl="4"/>
             <a:r>
-              <a:rPr lang="en-US" smtClean="0"/>
+              <a:rPr lang="en-US"/>
               <a:t>Fifth level</a:t>
             </a:r>
-            <a:endParaRPr lang="en-US"/>
           </a:p>
         </p:txBody>
       </p:sp>
@@ -1348,7 +1352,7 @@
           <a:p>
             <a:fld id="{5BCAD085-E8A6-8845-BD4E-CB4CCA059FC4}" type="datetimeFigureOut">
               <a:rPr lang="en-US" smtClean="0"/>
-              <a:t>1/27/13</a:t>
+              <a:t>8/30/2026</a:t>
             </a:fld>
             <a:endParaRPr lang="en-US"/>
           </a:p>
@@ -1446,10 +1450,9 @@
           </a:lstStyle>
           <a:p>
             <a:r>
-              <a:rPr lang="en-US" smtClean="0"/>
+              <a:rPr lang="en-US"/>
               <a:t>Click to edit Master title style</a:t>
             </a:r>
-            <a:endParaRPr lang="en-US"/>
           </a:p>
         </p:txBody>
       </p:sp>
@@ -1512,7 +1515,7 @@
           <a:p>
             <a:pPr lvl="0"/>
             <a:r>
-              <a:rPr lang="en-US" smtClean="0"/>
+              <a:rPr lang="en-US"/>
               <a:t>Click to edit Master text styles</a:t>
             </a:r>
           </a:p>
@@ -1568,38 +1571,37 @@
           <a:p>
             <a:pPr lvl="0"/>
             <a:r>
-              <a:rPr lang="en-US" smtClean="0"/>
+              <a:rPr lang="en-US"/>
               <a:t>Click to edit Master text styles</a:t>
             </a:r>
           </a:p>
           <a:p>
             <a:pPr lvl="1"/>
             <a:r>
-              <a:rPr lang="en-US" smtClean="0"/>
+              <a:rPr lang="en-US"/>
               <a:t>Second level</a:t>
             </a:r>
           </a:p>
           <a:p>
             <a:pPr lvl="2"/>
             <a:r>
-              <a:rPr lang="en-US" smtClean="0"/>
+              <a:rPr lang="en-US"/>
               <a:t>Third level</a:t>
             </a:r>
           </a:p>
           <a:p>
             <a:pPr lvl="3"/>
             <a:r>
-              <a:rPr lang="en-US" smtClean="0"/>
+              <a:rPr lang="en-US"/>
               <a:t>Fourth level</a:t>
             </a:r>
           </a:p>
           <a:p>
             <a:pPr lvl="4"/>
             <a:r>
-              <a:rPr lang="en-US" smtClean="0"/>
+              <a:rPr lang="en-US"/>
               <a:t>Fifth level</a:t>
             </a:r>
-            <a:endParaRPr lang="en-US"/>
           </a:p>
         </p:txBody>
       </p:sp>
@@ -1662,7 +1664,7 @@
           <a:p>
             <a:pPr lvl="0"/>
             <a:r>
-              <a:rPr lang="en-US" smtClean="0"/>
+              <a:rPr lang="en-US"/>
               <a:t>Click to edit Master text styles</a:t>
             </a:r>
           </a:p>
@@ -1718,38 +1720,37 @@
           <a:p>
             <a:pPr lvl="0"/>
             <a:r>
-              <a:rPr lang="en-US" smtClean="0"/>
+              <a:rPr lang="en-US"/>
               <a:t>Click to edit Master text styles</a:t>
             </a:r>
           </a:p>
           <a:p>
             <a:pPr lvl="1"/>
             <a:r>
-              <a:rPr lang="en-US" smtClean="0"/>
+              <a:rPr lang="en-US"/>
               <a:t>Second level</a:t>
             </a:r>
           </a:p>
           <a:p>
             <a:pPr lvl="2"/>
             <a:r>
-              <a:rPr lang="en-US" smtClean="0"/>
+              <a:rPr lang="en-US"/>
               <a:t>Third level</a:t>
             </a:r>
           </a:p>
           <a:p>
             <a:pPr lvl="3"/>
             <a:r>
-              <a:rPr lang="en-US" smtClean="0"/>
+              <a:rPr lang="en-US"/>
               <a:t>Fourth level</a:t>
             </a:r>
           </a:p>
           <a:p>
             <a:pPr lvl="4"/>
             <a:r>
-              <a:rPr lang="en-US" smtClean="0"/>
+              <a:rPr lang="en-US"/>
               <a:t>Fifth level</a:t>
             </a:r>
-            <a:endParaRPr lang="en-US"/>
           </a:p>
         </p:txBody>
       </p:sp>
@@ -1770,7 +1771,7 @@
           <a:p>
             <a:fld id="{5BCAD085-E8A6-8845-BD4E-CB4CCA059FC4}" type="datetimeFigureOut">
               <a:rPr lang="en-US" smtClean="0"/>
-              <a:t>1/27/13</a:t>
+              <a:t>8/30/2026</a:t>
             </a:fld>
             <a:endParaRPr lang="en-US"/>
           </a:p>
@@ -1864,10 +1865,9 @@
           <a:lstStyle/>
           <a:p>
             <a:r>
-              <a:rPr lang="en-US" smtClean="0"/>
+              <a:rPr lang="en-US"/>
               <a:t>Click to edit Master title style</a:t>
             </a:r>
-            <a:endParaRPr lang="en-US"/>
           </a:p>
         </p:txBody>
       </p:sp>
@@ -1888,7 +1888,7 @@
           <a:p>
             <a:fld id="{5BCAD085-E8A6-8845-BD4E-CB4CCA059FC4}" type="datetimeFigureOut">
               <a:rPr lang="en-US" smtClean="0"/>
-              <a:t>1/27/13</a:t>
+              <a:t>8/30/2026</a:t>
             </a:fld>
             <a:endParaRPr lang="en-US"/>
           </a:p>
@@ -1983,7 +1983,7 @@
           <a:p>
             <a:fld id="{5BCAD085-E8A6-8845-BD4E-CB4CCA059FC4}" type="datetimeFigureOut">
               <a:rPr lang="en-US" smtClean="0"/>
-              <a:t>1/27/13</a:t>
+              <a:t>8/30/2026</a:t>
             </a:fld>
             <a:endParaRPr lang="en-US"/>
           </a:p>
@@ -2086,10 +2086,9 @@
           </a:lstStyle>
           <a:p>
             <a:r>
-              <a:rPr lang="en-US" smtClean="0"/>
+              <a:rPr lang="en-US"/>
               <a:t>Click to edit Master title style</a:t>
             </a:r>
-            <a:endParaRPr lang="en-US"/>
           </a:p>
         </p:txBody>
       </p:sp>
@@ -2143,38 +2142,37 @@
           <a:p>
             <a:pPr lvl="0"/>
             <a:r>
-              <a:rPr lang="en-US" smtClean="0"/>
+              <a:rPr lang="en-US"/>
               <a:t>Click to edit Master text styles</a:t>
             </a:r>
           </a:p>
           <a:p>
             <a:pPr lvl="1"/>
             <a:r>
-              <a:rPr lang="en-US" smtClean="0"/>
+              <a:rPr lang="en-US"/>
               <a:t>Second level</a:t>
             </a:r>
           </a:p>
           <a:p>
             <a:pPr lvl="2"/>
             <a:r>
-              <a:rPr lang="en-US" smtClean="0"/>
+              <a:rPr lang="en-US"/>
               <a:t>Third level</a:t>
             </a:r>
           </a:p>
           <a:p>
             <a:pPr lvl="3"/>
             <a:r>
-              <a:rPr lang="en-US" smtClean="0"/>
+              <a:rPr lang="en-US"/>
               <a:t>Fourth level</a:t>
             </a:r>
           </a:p>
           <a:p>
             <a:pPr lvl="4"/>
             <a:r>
-              <a:rPr lang="en-US" smtClean="0"/>
+              <a:rPr lang="en-US"/>
               <a:t>Fifth level</a:t>
             </a:r>
-            <a:endParaRPr lang="en-US"/>
           </a:p>
         </p:txBody>
       </p:sp>
@@ -2237,7 +2235,7 @@
           <a:p>
             <a:pPr lvl="0"/>
             <a:r>
-              <a:rPr lang="en-US" smtClean="0"/>
+              <a:rPr lang="en-US"/>
               <a:t>Click to edit Master text styles</a:t>
             </a:r>
           </a:p>
@@ -2260,7 +2258,7 @@
           <a:p>
             <a:fld id="{5BCAD085-E8A6-8845-BD4E-CB4CCA059FC4}" type="datetimeFigureOut">
               <a:rPr lang="en-US" smtClean="0"/>
-              <a:t>1/27/13</a:t>
+              <a:t>8/30/2026</a:t>
             </a:fld>
             <a:endParaRPr lang="en-US"/>
           </a:p>
@@ -2363,10 +2361,9 @@
           </a:lstStyle>
           <a:p>
             <a:r>
-              <a:rPr lang="en-US" smtClean="0"/>
+              <a:rPr lang="en-US"/>
               <a:t>Click to edit Master title style</a:t>
             </a:r>
-            <a:endParaRPr lang="en-US"/>
           </a:p>
         </p:txBody>
       </p:sp>
@@ -2490,7 +2487,7 @@
           <a:p>
             <a:pPr lvl="0"/>
             <a:r>
-              <a:rPr lang="en-US" smtClean="0"/>
+              <a:rPr lang="en-US"/>
               <a:t>Click to edit Master text styles</a:t>
             </a:r>
           </a:p>
@@ -2513,7 +2510,7 @@
           <a:p>
             <a:fld id="{5BCAD085-E8A6-8845-BD4E-CB4CCA059FC4}" type="datetimeFigureOut">
               <a:rPr lang="en-US" smtClean="0"/>
-              <a:t>1/27/13</a:t>
+              <a:t>8/30/2026</a:t>
             </a:fld>
             <a:endParaRPr lang="en-US"/>
           </a:p>
@@ -2622,10 +2619,9 @@
           <a:lstStyle/>
           <a:p>
             <a:r>
-              <a:rPr lang="en-US" smtClean="0"/>
+              <a:rPr lang="en-US"/>
               <a:t>Click to edit Master title style</a:t>
             </a:r>
-            <a:endParaRPr lang="en-US"/>
           </a:p>
         </p:txBody>
       </p:sp>
@@ -2656,38 +2652,37 @@
           <a:p>
             <a:pPr lvl="0"/>
             <a:r>
-              <a:rPr lang="en-US" smtClean="0"/>
+              <a:rPr lang="en-US"/>
               <a:t>Click to edit Master text styles</a:t>
             </a:r>
           </a:p>
           <a:p>
             <a:pPr lvl="1"/>
             <a:r>
-              <a:rPr lang="en-US" smtClean="0"/>
+              <a:rPr lang="en-US"/>
               <a:t>Second level</a:t>
             </a:r>
           </a:p>
           <a:p>
             <a:pPr lvl="2"/>
             <a:r>
-              <a:rPr lang="en-US" smtClean="0"/>
+              <a:rPr lang="en-US"/>
               <a:t>Third level</a:t>
             </a:r>
           </a:p>
           <a:p>
             <a:pPr lvl="3"/>
             <a:r>
-              <a:rPr lang="en-US" smtClean="0"/>
+              <a:rPr lang="en-US"/>
               <a:t>Fourth level</a:t>
             </a:r>
           </a:p>
           <a:p>
             <a:pPr lvl="4"/>
             <a:r>
-              <a:rPr lang="en-US" smtClean="0"/>
+              <a:rPr lang="en-US"/>
               <a:t>Fifth level</a:t>
             </a:r>
-            <a:endParaRPr lang="en-US"/>
           </a:p>
         </p:txBody>
       </p:sp>
@@ -2726,7 +2721,7 @@
           <a:p>
             <a:fld id="{5BCAD085-E8A6-8845-BD4E-CB4CCA059FC4}" type="datetimeFigureOut">
               <a:rPr lang="en-US" smtClean="0"/>
-              <a:t>1/27/13</a:t>
+              <a:t>8/30/2026</a:t>
             </a:fld>
             <a:endParaRPr lang="en-US"/>
           </a:p>
@@ -3085,7 +3080,7 @@
 </file>
 
 <file path=ppt/slides/slide1.xml><?xml version="1.0" encoding="utf-8"?>
-<p:sld xmlns:a="http://schemas.openxmlformats.org/drawingml/2006/main" xmlns:p="http://schemas.openxmlformats.org/presentationml/2006/main" xmlns:r="http://schemas.openxmlformats.org/officeDocument/2006/relationships">
+<p:sld xmlns:a="http://schemas.openxmlformats.org/drawingml/2006/main" xmlns:r="http://schemas.openxmlformats.org/officeDocument/2006/relationships" xmlns:p="http://schemas.openxmlformats.org/presentationml/2006/main">
   <p:cSld>
     <p:bg>
       <p:bgPr>
@@ -3101,7 +3096,14 @@
         <p:cNvGrpSpPr/>
         <p:nvPr/>
       </p:nvGrpSpPr>
-      <p:grpSpPr/>
+      <p:grpSpPr>
+        <a:xfrm>
+          <a:off x="0" y="0"/>
+          <a:ext cx="0" cy="0"/>
+          <a:chOff x="0" y="0"/>
+          <a:chExt cx="0" cy="0"/>
+        </a:xfrm>
+      </p:grpSpPr>
       <p:sp>
         <p:nvSpPr>
           <p:cNvPr id="2" name="Oval 1"/>
@@ -3143,6 +3145,7 @@
           <a:lstStyle/>
           <a:p>
             <a:pPr algn="ctr"/>
+            <a:endParaRPr/>
           </a:p>
         </p:txBody>
       </p:sp>
@@ -3163,7 +3166,7 @@
           <a:noFill/>
         </p:spPr>
         <p:txBody>
-          <a:bodyPr wrap="square" anchor="t" lIns="0" rIns="0" tIns="0" bIns="0">
+          <a:bodyPr wrap="square" lIns="0" tIns="0" rIns="0" bIns="0" anchor="t">
             <a:spAutoFit/>
           </a:bodyPr>
           <a:lstStyle/>
@@ -3198,7 +3201,7 @@
           <a:noFill/>
         </p:spPr>
         <p:txBody>
-          <a:bodyPr wrap="square" anchor="t" lIns="0" rIns="0" tIns="0" bIns="0">
+          <a:bodyPr wrap="square" lIns="0" tIns="0" rIns="0" bIns="0" anchor="t">
             <a:spAutoFit/>
           </a:bodyPr>
           <a:lstStyle/>
@@ -3234,7 +3237,7 @@
         <p:spPr>
           <a:xfrm>
             <a:off x="822960" y="3520440"/>
-            <a:ext cx="9601200" cy="1097280"/>
+            <a:ext cx="9601200" cy="738664"/>
           </a:xfrm>
           <a:prstGeom prst="rect">
             <a:avLst/>
@@ -3242,33 +3245,27 @@
           <a:noFill/>
         </p:spPr>
         <p:txBody>
-          <a:bodyPr wrap="square" anchor="t" lIns="0" rIns="0" tIns="0" bIns="0">
+          <a:bodyPr wrap="square" lIns="0" tIns="0" rIns="0" bIns="0" anchor="t">
             <a:spAutoFit/>
           </a:bodyPr>
           <a:lstStyle/>
           <a:p>
             <a:pPr algn="l"/>
             <a:r>
-              <a:rPr sz="1600" b="0">
+              <a:rPr lang="en-US" sz="1600" b="0">
                 <a:solidFill>
                   <a:srgbClr val="CADCFC"/>
                 </a:solidFill>
                 <a:latin typeface="Calibri"/>
               </a:rPr>
-              <a:t>Ten capabilities the agent provides that a direct Graph API push must rebuild — </a:t>
-            </a:r>
-          </a:p>
-          <a:p>
-            <a:pPr algn="l"/>
-            <a:r>
-              <a:rPr sz="1600" b="0">
-                <a:solidFill>
-                  <a:srgbClr val="CADCFC"/>
-                </a:solidFill>
-                <a:latin typeface="Calibri"/>
-              </a:rPr>
-              <a:t>and the short list it cannot take away.</a:t>
-            </a:r>
+              <a:t>Ten capabilities the agent provides that a direct Graph API push must rebuild — and the short list it cannot take away. Written before that rebuild happened: eight of the ten now exist and have been live-tested at 111,800 items. See the final slide.</a:t>
+            </a:r>
+            <a:endParaRPr sz="1600" b="0">
+              <a:solidFill>
+                <a:srgbClr val="CADCFC"/>
+              </a:solidFill>
+              <a:latin typeface="Calibri"/>
+            </a:endParaRPr>
           </a:p>
         </p:txBody>
       </p:sp>
@@ -3289,7 +3286,7 @@
           <a:noFill/>
         </p:spPr>
         <p:txBody>
-          <a:bodyPr wrap="square" anchor="ctr" lIns="0" rIns="0" tIns="0" bIns="0">
+          <a:bodyPr wrap="square" lIns="0" tIns="0" rIns="0" bIns="0" anchor="ctr">
             <a:spAutoFit/>
           </a:bodyPr>
           <a:lstStyle/>
@@ -3316,7 +3313,7 @@
 </file>
 
 <file path=ppt/slides/slide2.xml><?xml version="1.0" encoding="utf-8"?>
-<p:sld xmlns:a="http://schemas.openxmlformats.org/drawingml/2006/main" xmlns:p="http://schemas.openxmlformats.org/presentationml/2006/main" xmlns:r="http://schemas.openxmlformats.org/officeDocument/2006/relationships">
+<p:sld xmlns:a="http://schemas.openxmlformats.org/drawingml/2006/main" xmlns:r="http://schemas.openxmlformats.org/officeDocument/2006/relationships" xmlns:p="http://schemas.openxmlformats.org/presentationml/2006/main">
   <p:cSld>
     <p:bg>
       <p:bgPr>
@@ -3332,7 +3329,14 @@
         <p:cNvGrpSpPr/>
         <p:nvPr/>
       </p:nvGrpSpPr>
-      <p:grpSpPr/>
+      <p:grpSpPr>
+        <a:xfrm>
+          <a:off x="0" y="0"/>
+          <a:ext cx="0" cy="0"/>
+          <a:chOff x="0" y="0"/>
+          <a:chExt cx="0" cy="0"/>
+        </a:xfrm>
+      </p:grpSpPr>
       <p:sp>
         <p:nvSpPr>
           <p:cNvPr id="2" name="TextBox 1"/>
@@ -3350,7 +3354,7 @@
           <a:noFill/>
         </p:spPr>
         <p:txBody>
-          <a:bodyPr wrap="square" anchor="t" lIns="0" rIns="0" tIns="0" bIns="0">
+          <a:bodyPr wrap="square" lIns="0" tIns="0" rIns="0" bIns="0" anchor="t">
             <a:spAutoFit/>
           </a:bodyPr>
           <a:lstStyle/>
@@ -3385,7 +3389,7 @@
           <a:noFill/>
         </p:spPr>
         <p:txBody>
-          <a:bodyPr wrap="square" anchor="t" lIns="0" rIns="0" tIns="0" bIns="0">
+          <a:bodyPr wrap="square" lIns="0" tIns="0" rIns="0" bIns="0" anchor="t">
             <a:spAutoFit/>
           </a:bodyPr>
           <a:lstStyle/>
@@ -3420,7 +3424,7 @@
           <a:noFill/>
         </p:spPr>
         <p:txBody>
-          <a:bodyPr wrap="square" anchor="t" lIns="0" rIns="0" tIns="0" bIns="0">
+          <a:bodyPr wrap="square" lIns="0" tIns="0" rIns="0" bIns="0" anchor="t">
             <a:spAutoFit/>
           </a:bodyPr>
           <a:lstStyle/>
@@ -3477,7 +3481,7 @@
           </a:fontRef>
         </p:style>
         <p:txBody>
-          <a:bodyPr rtlCol="0" anchor="ctr" wrap="square" lIns="45720" rIns="45720"/>
+          <a:bodyPr wrap="square" lIns="45720" rIns="45720" rtlCol="0" anchor="ctr"/>
           <a:lstStyle/>
           <a:p>
             <a:pPr algn="ctr"/>
@@ -3549,6 +3553,7 @@
           <a:lstStyle/>
           <a:p>
             <a:pPr algn="ctr"/>
+            <a:endParaRPr/>
           </a:p>
         </p:txBody>
       </p:sp>
@@ -3591,7 +3596,7 @@
           </a:fontRef>
         </p:style>
         <p:txBody>
-          <a:bodyPr rtlCol="0" anchor="ctr" wrap="square" lIns="45720" rIns="45720"/>
+          <a:bodyPr wrap="square" lIns="45720" rIns="45720" rtlCol="0" anchor="ctr"/>
           <a:lstStyle/>
           <a:p>
             <a:pPr algn="ctr"/>
@@ -3663,6 +3668,7 @@
           <a:lstStyle/>
           <a:p>
             <a:pPr algn="ctr"/>
+            <a:endParaRPr/>
           </a:p>
         </p:txBody>
       </p:sp>
@@ -3705,7 +3711,7 @@
           </a:fontRef>
         </p:style>
         <p:txBody>
-          <a:bodyPr rtlCol="0" anchor="ctr" wrap="square" lIns="45720" rIns="45720"/>
+          <a:bodyPr wrap="square" lIns="45720" rIns="45720" rtlCol="0" anchor="ctr"/>
           <a:lstStyle/>
           <a:p>
             <a:pPr algn="ctr"/>
@@ -3777,6 +3783,7 @@
           <a:lstStyle/>
           <a:p>
             <a:pPr algn="ctr"/>
+            <a:endParaRPr/>
           </a:p>
         </p:txBody>
       </p:sp>
@@ -3819,7 +3826,7 @@
           </a:fontRef>
         </p:style>
         <p:txBody>
-          <a:bodyPr rtlCol="0" anchor="ctr" wrap="square" lIns="45720" rIns="45720"/>
+          <a:bodyPr wrap="square" lIns="45720" rIns="45720" rtlCol="0" anchor="ctr"/>
           <a:lstStyle/>
           <a:p>
             <a:pPr algn="ctr"/>
@@ -3891,6 +3898,7 @@
           <a:lstStyle/>
           <a:p>
             <a:pPr algn="ctr"/>
+            <a:endParaRPr/>
           </a:p>
         </p:txBody>
       </p:sp>
@@ -3933,7 +3941,7 @@
           </a:fontRef>
         </p:style>
         <p:txBody>
-          <a:bodyPr rtlCol="0" anchor="ctr" wrap="square" lIns="45720" rIns="45720"/>
+          <a:bodyPr wrap="square" lIns="45720" rIns="45720" rtlCol="0" anchor="ctr"/>
           <a:lstStyle/>
           <a:p>
             <a:pPr algn="ctr"/>
@@ -3993,6 +4001,7 @@
           <a:lstStyle/>
           <a:p>
             <a:pPr algn="ctr"/>
+            <a:endParaRPr/>
           </a:p>
         </p:txBody>
       </p:sp>
@@ -4035,7 +4044,7 @@
           </a:fontRef>
         </p:style>
         <p:txBody>
-          <a:bodyPr rtlCol="0" anchor="ctr" wrap="square" lIns="45720" rIns="45720"/>
+          <a:bodyPr wrap="square" lIns="45720" rIns="45720" rtlCol="0" anchor="ctr"/>
           <a:lstStyle/>
           <a:p>
             <a:pPr algn="ctr"/>
@@ -4068,7 +4077,7 @@
           <a:noFill/>
         </p:spPr>
         <p:txBody>
-          <a:bodyPr wrap="square" anchor="t" lIns="0" rIns="0" tIns="0" bIns="0">
+          <a:bodyPr wrap="square" lIns="0" tIns="0" rIns="0" bIns="0" anchor="t">
             <a:spAutoFit/>
           </a:bodyPr>
           <a:lstStyle/>
@@ -4125,7 +4134,7 @@
           </a:fontRef>
         </p:style>
         <p:txBody>
-          <a:bodyPr rtlCol="0" anchor="ctr" wrap="square" lIns="45720" rIns="45720"/>
+          <a:bodyPr wrap="square" lIns="45720" rIns="45720" rtlCol="0" anchor="ctr"/>
           <a:lstStyle/>
           <a:p>
             <a:pPr algn="ctr"/>
@@ -4197,6 +4206,7 @@
           <a:lstStyle/>
           <a:p>
             <a:pPr algn="ctr"/>
+            <a:endParaRPr/>
           </a:p>
         </p:txBody>
       </p:sp>
@@ -4242,7 +4252,7 @@
           </a:fontRef>
         </p:style>
         <p:txBody>
-          <a:bodyPr rtlCol="0" anchor="ctr" wrap="square" lIns="45720" rIns="45720"/>
+          <a:bodyPr wrap="square" lIns="45720" rIns="45720" rtlCol="0" anchor="ctr"/>
           <a:lstStyle/>
           <a:p>
             <a:pPr algn="ctr"/>
@@ -4314,6 +4324,7 @@
           <a:lstStyle/>
           <a:p>
             <a:pPr algn="ctr"/>
+            <a:endParaRPr/>
           </a:p>
         </p:txBody>
       </p:sp>
@@ -4356,7 +4367,7 @@
           </a:fontRef>
         </p:style>
         <p:txBody>
-          <a:bodyPr rtlCol="0" anchor="ctr" wrap="square" lIns="45720" rIns="45720"/>
+          <a:bodyPr wrap="square" lIns="45720" rIns="45720" rtlCol="0" anchor="ctr"/>
           <a:lstStyle/>
           <a:p>
             <a:pPr algn="ctr"/>
@@ -4401,7 +4412,7 @@
           <a:noFill/>
         </p:spPr>
         <p:txBody>
-          <a:bodyPr wrap="square" anchor="t" lIns="0" rIns="0" tIns="0" bIns="0">
+          <a:bodyPr wrap="square" lIns="0" tIns="0" rIns="0" bIns="0" anchor="t">
             <a:spAutoFit/>
           </a:bodyPr>
           <a:lstStyle/>
@@ -4457,7 +4468,7 @@
 </file>
 
 <file path=ppt/slides/slide3.xml><?xml version="1.0" encoding="utf-8"?>
-<p:sld xmlns:a="http://schemas.openxmlformats.org/drawingml/2006/main" xmlns:p="http://schemas.openxmlformats.org/presentationml/2006/main" xmlns:r="http://schemas.openxmlformats.org/officeDocument/2006/relationships">
+<p:sld xmlns:a="http://schemas.openxmlformats.org/drawingml/2006/main" xmlns:r="http://schemas.openxmlformats.org/officeDocument/2006/relationships" xmlns:p="http://schemas.openxmlformats.org/presentationml/2006/main">
   <p:cSld>
     <p:bg>
       <p:bgPr>
@@ -4473,7 +4484,14 @@
         <p:cNvGrpSpPr/>
         <p:nvPr/>
       </p:nvGrpSpPr>
-      <p:grpSpPr/>
+      <p:grpSpPr>
+        <a:xfrm>
+          <a:off x="0" y="0"/>
+          <a:ext cx="0" cy="0"/>
+          <a:chOff x="0" y="0"/>
+          <a:chExt cx="0" cy="0"/>
+        </a:xfrm>
+      </p:grpSpPr>
       <p:sp>
         <p:nvSpPr>
           <p:cNvPr id="2" name="TextBox 1"/>
@@ -4491,7 +4509,7 @@
           <a:noFill/>
         </p:spPr>
         <p:txBody>
-          <a:bodyPr wrap="square" anchor="t" lIns="0" rIns="0" tIns="0" bIns="0">
+          <a:bodyPr wrap="square" lIns="0" tIns="0" rIns="0" bIns="0" anchor="t">
             <a:spAutoFit/>
           </a:bodyPr>
           <a:lstStyle/>
@@ -4526,7 +4544,7 @@
           <a:noFill/>
         </p:spPr>
         <p:txBody>
-          <a:bodyPr wrap="square" anchor="t" lIns="0" rIns="0" tIns="0" bIns="0">
+          <a:bodyPr wrap="square" lIns="0" tIns="0" rIns="0" bIns="0" anchor="t">
             <a:spAutoFit/>
           </a:bodyPr>
           <a:lstStyle/>
@@ -4587,6 +4605,7 @@
           <a:lstStyle/>
           <a:p>
             <a:pPr algn="ctr"/>
+            <a:endParaRPr/>
           </a:p>
         </p:txBody>
       </p:sp>
@@ -4627,7 +4646,7 @@
           </a:fontRef>
         </p:style>
         <p:txBody>
-          <a:bodyPr rtlCol="0" anchor="ctr" wrap="none" lIns="0" rIns="0" tIns="0" bIns="0"/>
+          <a:bodyPr wrap="none" lIns="0" tIns="0" rIns="0" bIns="0" rtlCol="0" anchor="ctr"/>
           <a:lstStyle/>
           <a:p>
             <a:pPr algn="ctr"/>
@@ -4660,7 +4679,7 @@
           <a:noFill/>
         </p:spPr>
         <p:txBody>
-          <a:bodyPr wrap="square" anchor="t" lIns="0" rIns="0" tIns="0" bIns="0">
+          <a:bodyPr wrap="square" lIns="0" tIns="0" rIns="0" bIns="0" anchor="t">
             <a:spAutoFit/>
           </a:bodyPr>
           <a:lstStyle/>
@@ -4695,7 +4714,7 @@
           <a:noFill/>
         </p:spPr>
         <p:txBody>
-          <a:bodyPr wrap="square" anchor="t" lIns="0" rIns="0" tIns="0" bIns="0">
+          <a:bodyPr wrap="square" lIns="0" tIns="0" rIns="0" bIns="0" anchor="t">
             <a:spAutoFit/>
           </a:bodyPr>
           <a:lstStyle/>
@@ -4756,6 +4775,7 @@
           <a:lstStyle/>
           <a:p>
             <a:pPr algn="ctr"/>
+            <a:endParaRPr/>
           </a:p>
         </p:txBody>
       </p:sp>
@@ -4796,7 +4816,7 @@
           </a:fontRef>
         </p:style>
         <p:txBody>
-          <a:bodyPr rtlCol="0" anchor="ctr" wrap="none" lIns="0" rIns="0" tIns="0" bIns="0"/>
+          <a:bodyPr wrap="none" lIns="0" tIns="0" rIns="0" bIns="0" rtlCol="0" anchor="ctr"/>
           <a:lstStyle/>
           <a:p>
             <a:pPr algn="ctr"/>
@@ -4829,7 +4849,7 @@
           <a:noFill/>
         </p:spPr>
         <p:txBody>
-          <a:bodyPr wrap="square" anchor="t" lIns="0" rIns="0" tIns="0" bIns="0">
+          <a:bodyPr wrap="square" lIns="0" tIns="0" rIns="0" bIns="0" anchor="t">
             <a:spAutoFit/>
           </a:bodyPr>
           <a:lstStyle/>
@@ -4864,7 +4884,7 @@
           <a:noFill/>
         </p:spPr>
         <p:txBody>
-          <a:bodyPr wrap="square" anchor="t" lIns="0" rIns="0" tIns="0" bIns="0">
+          <a:bodyPr wrap="square" lIns="0" tIns="0" rIns="0" bIns="0" anchor="t">
             <a:spAutoFit/>
           </a:bodyPr>
           <a:lstStyle/>
@@ -4925,6 +4945,7 @@
           <a:lstStyle/>
           <a:p>
             <a:pPr algn="ctr"/>
+            <a:endParaRPr/>
           </a:p>
         </p:txBody>
       </p:sp>
@@ -4965,7 +4986,7 @@
           </a:fontRef>
         </p:style>
         <p:txBody>
-          <a:bodyPr rtlCol="0" anchor="ctr" wrap="none" lIns="0" rIns="0" tIns="0" bIns="0"/>
+          <a:bodyPr wrap="none" lIns="0" tIns="0" rIns="0" bIns="0" rtlCol="0" anchor="ctr"/>
           <a:lstStyle/>
           <a:p>
             <a:pPr algn="ctr"/>
@@ -4998,7 +5019,7 @@
           <a:noFill/>
         </p:spPr>
         <p:txBody>
-          <a:bodyPr wrap="square" anchor="t" lIns="0" rIns="0" tIns="0" bIns="0">
+          <a:bodyPr wrap="square" lIns="0" tIns="0" rIns="0" bIns="0" anchor="t">
             <a:spAutoFit/>
           </a:bodyPr>
           <a:lstStyle/>
@@ -5033,7 +5054,7 @@
           <a:noFill/>
         </p:spPr>
         <p:txBody>
-          <a:bodyPr wrap="square" anchor="t" lIns="0" rIns="0" tIns="0" bIns="0">
+          <a:bodyPr wrap="square" lIns="0" tIns="0" rIns="0" bIns="0" anchor="t">
             <a:spAutoFit/>
           </a:bodyPr>
           <a:lstStyle/>
@@ -5094,6 +5115,7 @@
           <a:lstStyle/>
           <a:p>
             <a:pPr algn="ctr"/>
+            <a:endParaRPr/>
           </a:p>
         </p:txBody>
       </p:sp>
@@ -5134,7 +5156,7 @@
           </a:fontRef>
         </p:style>
         <p:txBody>
-          <a:bodyPr rtlCol="0" anchor="ctr" wrap="none" lIns="0" rIns="0" tIns="0" bIns="0"/>
+          <a:bodyPr wrap="none" lIns="0" tIns="0" rIns="0" bIns="0" rtlCol="0" anchor="ctr"/>
           <a:lstStyle/>
           <a:p>
             <a:pPr algn="ctr"/>
@@ -5167,7 +5189,7 @@
           <a:noFill/>
         </p:spPr>
         <p:txBody>
-          <a:bodyPr wrap="square" anchor="t" lIns="0" rIns="0" tIns="0" bIns="0">
+          <a:bodyPr wrap="square" lIns="0" tIns="0" rIns="0" bIns="0" anchor="t">
             <a:spAutoFit/>
           </a:bodyPr>
           <a:lstStyle/>
@@ -5202,7 +5224,7 @@
           <a:noFill/>
         </p:spPr>
         <p:txBody>
-          <a:bodyPr wrap="square" anchor="t" lIns="0" rIns="0" tIns="0" bIns="0">
+          <a:bodyPr wrap="square" lIns="0" tIns="0" rIns="0" bIns="0" anchor="t">
             <a:spAutoFit/>
           </a:bodyPr>
           <a:lstStyle/>
@@ -5229,7 +5251,7 @@
 </file>
 
 <file path=ppt/slides/slide4.xml><?xml version="1.0" encoding="utf-8"?>
-<p:sld xmlns:a="http://schemas.openxmlformats.org/drawingml/2006/main" xmlns:p="http://schemas.openxmlformats.org/presentationml/2006/main" xmlns:r="http://schemas.openxmlformats.org/officeDocument/2006/relationships">
+<p:sld xmlns:a="http://schemas.openxmlformats.org/drawingml/2006/main" xmlns:r="http://schemas.openxmlformats.org/officeDocument/2006/relationships" xmlns:p="http://schemas.openxmlformats.org/presentationml/2006/main">
   <p:cSld>
     <p:bg>
       <p:bgPr>
@@ -5245,7 +5267,14 @@
         <p:cNvGrpSpPr/>
         <p:nvPr/>
       </p:nvGrpSpPr>
-      <p:grpSpPr/>
+      <p:grpSpPr>
+        <a:xfrm>
+          <a:off x="0" y="0"/>
+          <a:ext cx="0" cy="0"/>
+          <a:chOff x="0" y="0"/>
+          <a:chExt cx="0" cy="0"/>
+        </a:xfrm>
+      </p:grpSpPr>
       <p:sp>
         <p:nvSpPr>
           <p:cNvPr id="2" name="TextBox 1"/>
@@ -5263,7 +5292,7 @@
           <a:noFill/>
         </p:spPr>
         <p:txBody>
-          <a:bodyPr wrap="square" anchor="t" lIns="0" rIns="0" tIns="0" bIns="0">
+          <a:bodyPr wrap="square" lIns="0" tIns="0" rIns="0" bIns="0" anchor="t">
             <a:spAutoFit/>
           </a:bodyPr>
           <a:lstStyle/>
@@ -5298,7 +5327,7 @@
           <a:noFill/>
         </p:spPr>
         <p:txBody>
-          <a:bodyPr wrap="square" anchor="t" lIns="0" rIns="0" tIns="0" bIns="0">
+          <a:bodyPr wrap="square" lIns="0" tIns="0" rIns="0" bIns="0" anchor="t">
             <a:spAutoFit/>
           </a:bodyPr>
           <a:lstStyle/>
@@ -5359,6 +5388,7 @@
           <a:lstStyle/>
           <a:p>
             <a:pPr algn="ctr"/>
+            <a:endParaRPr/>
           </a:p>
         </p:txBody>
       </p:sp>
@@ -5399,7 +5429,7 @@
           </a:fontRef>
         </p:style>
         <p:txBody>
-          <a:bodyPr rtlCol="0" anchor="ctr" wrap="none" lIns="0" rIns="0" tIns="0" bIns="0"/>
+          <a:bodyPr wrap="none" lIns="0" tIns="0" rIns="0" bIns="0" rtlCol="0" anchor="ctr"/>
           <a:lstStyle/>
           <a:p>
             <a:pPr algn="ctr"/>
@@ -5432,7 +5462,7 @@
           <a:noFill/>
         </p:spPr>
         <p:txBody>
-          <a:bodyPr wrap="square" anchor="t" lIns="0" rIns="0" tIns="0" bIns="0">
+          <a:bodyPr wrap="square" lIns="0" tIns="0" rIns="0" bIns="0" anchor="t">
             <a:spAutoFit/>
           </a:bodyPr>
           <a:lstStyle/>
@@ -5467,7 +5497,7 @@
           <a:noFill/>
         </p:spPr>
         <p:txBody>
-          <a:bodyPr wrap="square" anchor="t" lIns="0" rIns="0" tIns="0" bIns="0">
+          <a:bodyPr wrap="square" lIns="0" tIns="0" rIns="0" bIns="0" anchor="t">
             <a:spAutoFit/>
           </a:bodyPr>
           <a:lstStyle/>
@@ -5528,6 +5558,7 @@
           <a:lstStyle/>
           <a:p>
             <a:pPr algn="ctr"/>
+            <a:endParaRPr/>
           </a:p>
         </p:txBody>
       </p:sp>
@@ -5568,7 +5599,7 @@
           </a:fontRef>
         </p:style>
         <p:txBody>
-          <a:bodyPr rtlCol="0" anchor="ctr" wrap="none" lIns="0" rIns="0" tIns="0" bIns="0"/>
+          <a:bodyPr wrap="none" lIns="0" tIns="0" rIns="0" bIns="0" rtlCol="0" anchor="ctr"/>
           <a:lstStyle/>
           <a:p>
             <a:pPr algn="ctr"/>
@@ -5601,7 +5632,7 @@
           <a:noFill/>
         </p:spPr>
         <p:txBody>
-          <a:bodyPr wrap="square" anchor="t" lIns="0" rIns="0" tIns="0" bIns="0">
+          <a:bodyPr wrap="square" lIns="0" tIns="0" rIns="0" bIns="0" anchor="t">
             <a:spAutoFit/>
           </a:bodyPr>
           <a:lstStyle/>
@@ -5636,7 +5667,7 @@
           <a:noFill/>
         </p:spPr>
         <p:txBody>
-          <a:bodyPr wrap="square" anchor="t" lIns="0" rIns="0" tIns="0" bIns="0">
+          <a:bodyPr wrap="square" lIns="0" tIns="0" rIns="0" bIns="0" anchor="t">
             <a:spAutoFit/>
           </a:bodyPr>
           <a:lstStyle/>
@@ -5697,6 +5728,7 @@
           <a:lstStyle/>
           <a:p>
             <a:pPr algn="ctr"/>
+            <a:endParaRPr/>
           </a:p>
         </p:txBody>
       </p:sp>
@@ -5737,7 +5769,7 @@
           </a:fontRef>
         </p:style>
         <p:txBody>
-          <a:bodyPr rtlCol="0" anchor="ctr" wrap="none" lIns="0" rIns="0" tIns="0" bIns="0"/>
+          <a:bodyPr wrap="none" lIns="0" tIns="0" rIns="0" bIns="0" rtlCol="0" anchor="ctr"/>
           <a:lstStyle/>
           <a:p>
             <a:pPr algn="ctr"/>
@@ -5770,7 +5802,7 @@
           <a:noFill/>
         </p:spPr>
         <p:txBody>
-          <a:bodyPr wrap="square" anchor="t" lIns="0" rIns="0" tIns="0" bIns="0">
+          <a:bodyPr wrap="square" lIns="0" tIns="0" rIns="0" bIns="0" anchor="t">
             <a:spAutoFit/>
           </a:bodyPr>
           <a:lstStyle/>
@@ -5805,7 +5837,7 @@
           <a:noFill/>
         </p:spPr>
         <p:txBody>
-          <a:bodyPr wrap="square" anchor="t" lIns="0" rIns="0" tIns="0" bIns="0">
+          <a:bodyPr wrap="square" lIns="0" tIns="0" rIns="0" bIns="0" anchor="t">
             <a:spAutoFit/>
           </a:bodyPr>
           <a:lstStyle/>
@@ -5832,7 +5864,7 @@
 </file>
 
 <file path=ppt/slides/slide5.xml><?xml version="1.0" encoding="utf-8"?>
-<p:sld xmlns:a="http://schemas.openxmlformats.org/drawingml/2006/main" xmlns:p="http://schemas.openxmlformats.org/presentationml/2006/main" xmlns:r="http://schemas.openxmlformats.org/officeDocument/2006/relationships">
+<p:sld xmlns:a="http://schemas.openxmlformats.org/drawingml/2006/main" xmlns:r="http://schemas.openxmlformats.org/officeDocument/2006/relationships" xmlns:p="http://schemas.openxmlformats.org/presentationml/2006/main">
   <p:cSld>
     <p:bg>
       <p:bgPr>
@@ -5848,7 +5880,14 @@
         <p:cNvGrpSpPr/>
         <p:nvPr/>
       </p:nvGrpSpPr>
-      <p:grpSpPr/>
+      <p:grpSpPr>
+        <a:xfrm>
+          <a:off x="0" y="0"/>
+          <a:ext cx="0" cy="0"/>
+          <a:chOff x="0" y="0"/>
+          <a:chExt cx="0" cy="0"/>
+        </a:xfrm>
+      </p:grpSpPr>
       <p:sp>
         <p:nvSpPr>
           <p:cNvPr id="2" name="TextBox 1"/>
@@ -5866,7 +5905,7 @@
           <a:noFill/>
         </p:spPr>
         <p:txBody>
-          <a:bodyPr wrap="square" anchor="t" lIns="0" rIns="0" tIns="0" bIns="0">
+          <a:bodyPr wrap="square" lIns="0" tIns="0" rIns="0" bIns="0" anchor="t">
             <a:spAutoFit/>
           </a:bodyPr>
           <a:lstStyle/>
@@ -5901,7 +5940,7 @@
           <a:noFill/>
         </p:spPr>
         <p:txBody>
-          <a:bodyPr wrap="square" anchor="t" lIns="0" rIns="0" tIns="0" bIns="0">
+          <a:bodyPr wrap="square" lIns="0" tIns="0" rIns="0" bIns="0" anchor="t">
             <a:spAutoFit/>
           </a:bodyPr>
           <a:lstStyle/>
@@ -5962,6 +6001,7 @@
           <a:lstStyle/>
           <a:p>
             <a:pPr algn="ctr"/>
+            <a:endParaRPr/>
           </a:p>
         </p:txBody>
       </p:sp>
@@ -6002,7 +6042,7 @@
           </a:fontRef>
         </p:style>
         <p:txBody>
-          <a:bodyPr rtlCol="0" anchor="ctr" wrap="none" lIns="0" rIns="0" tIns="0" bIns="0"/>
+          <a:bodyPr wrap="none" lIns="0" tIns="0" rIns="0" bIns="0" rtlCol="0" anchor="ctr"/>
           <a:lstStyle/>
           <a:p>
             <a:pPr algn="ctr"/>
@@ -6035,7 +6075,7 @@
           <a:noFill/>
         </p:spPr>
         <p:txBody>
-          <a:bodyPr wrap="square" anchor="t" lIns="0" rIns="0" tIns="0" bIns="0">
+          <a:bodyPr wrap="square" lIns="0" tIns="0" rIns="0" bIns="0" anchor="t">
             <a:spAutoFit/>
           </a:bodyPr>
           <a:lstStyle/>
@@ -6070,7 +6110,7 @@
           <a:noFill/>
         </p:spPr>
         <p:txBody>
-          <a:bodyPr wrap="square" anchor="t" lIns="0" rIns="0" tIns="0" bIns="0">
+          <a:bodyPr wrap="square" lIns="0" tIns="0" rIns="0" bIns="0" anchor="t">
             <a:spAutoFit/>
           </a:bodyPr>
           <a:lstStyle/>
@@ -6131,6 +6171,7 @@
           <a:lstStyle/>
           <a:p>
             <a:pPr algn="ctr"/>
+            <a:endParaRPr/>
           </a:p>
         </p:txBody>
       </p:sp>
@@ -6171,7 +6212,7 @@
           </a:fontRef>
         </p:style>
         <p:txBody>
-          <a:bodyPr rtlCol="0" anchor="ctr" wrap="none" lIns="0" rIns="0" tIns="0" bIns="0"/>
+          <a:bodyPr wrap="none" lIns="0" tIns="0" rIns="0" bIns="0" rtlCol="0" anchor="ctr"/>
           <a:lstStyle/>
           <a:p>
             <a:pPr algn="ctr"/>
@@ -6204,7 +6245,7 @@
           <a:noFill/>
         </p:spPr>
         <p:txBody>
-          <a:bodyPr wrap="square" anchor="t" lIns="0" rIns="0" tIns="0" bIns="0">
+          <a:bodyPr wrap="square" lIns="0" tIns="0" rIns="0" bIns="0" anchor="t">
             <a:spAutoFit/>
           </a:bodyPr>
           <a:lstStyle/>
@@ -6239,7 +6280,7 @@
           <a:noFill/>
         </p:spPr>
         <p:txBody>
-          <a:bodyPr wrap="square" anchor="t" lIns="0" rIns="0" tIns="0" bIns="0">
+          <a:bodyPr wrap="square" lIns="0" tIns="0" rIns="0" bIns="0" anchor="t">
             <a:spAutoFit/>
           </a:bodyPr>
           <a:lstStyle/>
@@ -6300,6 +6341,7 @@
           <a:lstStyle/>
           <a:p>
             <a:pPr algn="ctr"/>
+            <a:endParaRPr/>
           </a:p>
         </p:txBody>
       </p:sp>
@@ -6340,7 +6382,7 @@
           </a:fontRef>
         </p:style>
         <p:txBody>
-          <a:bodyPr rtlCol="0" anchor="ctr" wrap="none" lIns="0" rIns="0" tIns="0" bIns="0"/>
+          <a:bodyPr wrap="none" lIns="0" tIns="0" rIns="0" bIns="0" rtlCol="0" anchor="ctr"/>
           <a:lstStyle/>
           <a:p>
             <a:pPr algn="ctr"/>
@@ -6373,7 +6415,7 @@
           <a:noFill/>
         </p:spPr>
         <p:txBody>
-          <a:bodyPr wrap="square" anchor="t" lIns="0" rIns="0" tIns="0" bIns="0">
+          <a:bodyPr wrap="square" lIns="0" tIns="0" rIns="0" bIns="0" anchor="t">
             <a:spAutoFit/>
           </a:bodyPr>
           <a:lstStyle/>
@@ -6408,7 +6450,7 @@
           <a:noFill/>
         </p:spPr>
         <p:txBody>
-          <a:bodyPr wrap="square" anchor="t" lIns="0" rIns="0" tIns="0" bIns="0">
+          <a:bodyPr wrap="square" lIns="0" tIns="0" rIns="0" bIns="0" anchor="t">
             <a:spAutoFit/>
           </a:bodyPr>
           <a:lstStyle/>
@@ -6435,7 +6477,7 @@
 </file>
 
 <file path=ppt/slides/slide6.xml><?xml version="1.0" encoding="utf-8"?>
-<p:sld xmlns:a="http://schemas.openxmlformats.org/drawingml/2006/main" xmlns:p="http://schemas.openxmlformats.org/presentationml/2006/main" xmlns:r="http://schemas.openxmlformats.org/officeDocument/2006/relationships">
+<p:sld xmlns:a="http://schemas.openxmlformats.org/drawingml/2006/main" xmlns:r="http://schemas.openxmlformats.org/officeDocument/2006/relationships" xmlns:p="http://schemas.openxmlformats.org/presentationml/2006/main">
   <p:cSld>
     <p:bg>
       <p:bgPr>
@@ -6451,7 +6493,14 @@
         <p:cNvGrpSpPr/>
         <p:nvPr/>
       </p:nvGrpSpPr>
-      <p:grpSpPr/>
+      <p:grpSpPr>
+        <a:xfrm>
+          <a:off x="0" y="0"/>
+          <a:ext cx="0" cy="0"/>
+          <a:chOff x="0" y="0"/>
+          <a:chExt cx="0" cy="0"/>
+        </a:xfrm>
+      </p:grpSpPr>
       <p:sp>
         <p:nvSpPr>
           <p:cNvPr id="2" name="TextBox 1"/>
@@ -6469,7 +6518,7 @@
           <a:noFill/>
         </p:spPr>
         <p:txBody>
-          <a:bodyPr wrap="square" anchor="t" lIns="0" rIns="0" tIns="0" bIns="0">
+          <a:bodyPr wrap="square" lIns="0" tIns="0" rIns="0" bIns="0" anchor="t">
             <a:spAutoFit/>
           </a:bodyPr>
           <a:lstStyle/>
@@ -6504,7 +6553,7 @@
           <a:noFill/>
         </p:spPr>
         <p:txBody>
-          <a:bodyPr wrap="square" anchor="t" lIns="0" rIns="0" tIns="0" bIns="0">
+          <a:bodyPr wrap="square" lIns="0" tIns="0" rIns="0" bIns="0" anchor="t">
             <a:spAutoFit/>
           </a:bodyPr>
           <a:lstStyle/>
@@ -6565,6 +6614,7 @@
           <a:lstStyle/>
           <a:p>
             <a:pPr algn="ctr"/>
+            <a:endParaRPr/>
           </a:p>
         </p:txBody>
       </p:sp>
@@ -6605,7 +6655,7 @@
           </a:fontRef>
         </p:style>
         <p:txBody>
-          <a:bodyPr rtlCol="0" anchor="ctr" wrap="none" lIns="0" rIns="0" tIns="0" bIns="0"/>
+          <a:bodyPr wrap="none" lIns="0" tIns="0" rIns="0" bIns="0" rtlCol="0" anchor="ctr"/>
           <a:lstStyle/>
           <a:p>
             <a:pPr algn="ctr"/>
@@ -6638,7 +6688,7 @@
           <a:noFill/>
         </p:spPr>
         <p:txBody>
-          <a:bodyPr wrap="square" anchor="t" lIns="0" rIns="0" tIns="0" bIns="0">
+          <a:bodyPr wrap="square" lIns="0" tIns="0" rIns="0" bIns="0" anchor="t">
             <a:spAutoFit/>
           </a:bodyPr>
           <a:lstStyle/>
@@ -6673,7 +6723,7 @@
           <a:noFill/>
         </p:spPr>
         <p:txBody>
-          <a:bodyPr wrap="square" anchor="t" lIns="0" rIns="0" tIns="0" bIns="0">
+          <a:bodyPr wrap="square" lIns="0" tIns="0" rIns="0" bIns="0" anchor="t">
             <a:spAutoFit/>
           </a:bodyPr>
           <a:lstStyle/>
@@ -6734,6 +6784,7 @@
           <a:lstStyle/>
           <a:p>
             <a:pPr algn="ctr"/>
+            <a:endParaRPr/>
           </a:p>
         </p:txBody>
       </p:sp>
@@ -6774,7 +6825,7 @@
           </a:fontRef>
         </p:style>
         <p:txBody>
-          <a:bodyPr rtlCol="0" anchor="ctr" wrap="none" lIns="0" rIns="0" tIns="0" bIns="0"/>
+          <a:bodyPr wrap="none" lIns="0" tIns="0" rIns="0" bIns="0" rtlCol="0" anchor="ctr"/>
           <a:lstStyle/>
           <a:p>
             <a:pPr algn="ctr"/>
@@ -6807,7 +6858,7 @@
           <a:noFill/>
         </p:spPr>
         <p:txBody>
-          <a:bodyPr wrap="square" anchor="t" lIns="0" rIns="0" tIns="0" bIns="0">
+          <a:bodyPr wrap="square" lIns="0" tIns="0" rIns="0" bIns="0" anchor="t">
             <a:spAutoFit/>
           </a:bodyPr>
           <a:lstStyle/>
@@ -6842,7 +6893,7 @@
           <a:noFill/>
         </p:spPr>
         <p:txBody>
-          <a:bodyPr wrap="square" anchor="t" lIns="0" rIns="0" tIns="0" bIns="0">
+          <a:bodyPr wrap="square" lIns="0" tIns="0" rIns="0" bIns="0" anchor="t">
             <a:spAutoFit/>
           </a:bodyPr>
           <a:lstStyle/>
@@ -6903,6 +6954,7 @@
           <a:lstStyle/>
           <a:p>
             <a:pPr algn="ctr"/>
+            <a:endParaRPr/>
           </a:p>
         </p:txBody>
       </p:sp>
@@ -6943,7 +6995,7 @@
           </a:fontRef>
         </p:style>
         <p:txBody>
-          <a:bodyPr rtlCol="0" anchor="ctr" wrap="none" lIns="0" rIns="0" tIns="0" bIns="0"/>
+          <a:bodyPr wrap="none" lIns="0" tIns="0" rIns="0" bIns="0" rtlCol="0" anchor="ctr"/>
           <a:lstStyle/>
           <a:p>
             <a:pPr algn="ctr"/>
@@ -6976,7 +7028,7 @@
           <a:noFill/>
         </p:spPr>
         <p:txBody>
-          <a:bodyPr wrap="square" anchor="t" lIns="0" rIns="0" tIns="0" bIns="0">
+          <a:bodyPr wrap="square" lIns="0" tIns="0" rIns="0" bIns="0" anchor="t">
             <a:spAutoFit/>
           </a:bodyPr>
           <a:lstStyle/>
@@ -7011,7 +7063,7 @@
           <a:noFill/>
         </p:spPr>
         <p:txBody>
-          <a:bodyPr wrap="square" anchor="t" lIns="0" rIns="0" tIns="0" bIns="0">
+          <a:bodyPr wrap="square" lIns="0" tIns="0" rIns="0" bIns="0" anchor="t">
             <a:spAutoFit/>
           </a:bodyPr>
           <a:lstStyle/>
@@ -7072,6 +7124,7 @@
           <a:lstStyle/>
           <a:p>
             <a:pPr algn="ctr"/>
+            <a:endParaRPr/>
           </a:p>
         </p:txBody>
       </p:sp>
@@ -7112,7 +7165,7 @@
           </a:fontRef>
         </p:style>
         <p:txBody>
-          <a:bodyPr rtlCol="0" anchor="ctr" wrap="none" lIns="0" rIns="0" tIns="0" bIns="0"/>
+          <a:bodyPr wrap="none" lIns="0" tIns="0" rIns="0" bIns="0" rtlCol="0" anchor="ctr"/>
           <a:lstStyle/>
           <a:p>
             <a:pPr algn="ctr"/>
@@ -7145,7 +7198,7 @@
           <a:noFill/>
         </p:spPr>
         <p:txBody>
-          <a:bodyPr wrap="square" anchor="t" lIns="0" rIns="0" tIns="0" bIns="0">
+          <a:bodyPr wrap="square" lIns="0" tIns="0" rIns="0" bIns="0" anchor="t">
             <a:spAutoFit/>
           </a:bodyPr>
           <a:lstStyle/>
@@ -7180,7 +7233,7 @@
           <a:noFill/>
         </p:spPr>
         <p:txBody>
-          <a:bodyPr wrap="square" anchor="t" lIns="0" rIns="0" tIns="0" bIns="0">
+          <a:bodyPr wrap="square" lIns="0" tIns="0" rIns="0" bIns="0" anchor="t">
             <a:spAutoFit/>
           </a:bodyPr>
           <a:lstStyle/>
@@ -7215,7 +7268,7 @@
           <a:noFill/>
         </p:spPr>
         <p:txBody>
-          <a:bodyPr wrap="square" anchor="t" lIns="0" rIns="0" tIns="0" bIns="0">
+          <a:bodyPr wrap="square" lIns="0" tIns="0" rIns="0" bIns="0" anchor="t">
             <a:spAutoFit/>
           </a:bodyPr>
           <a:lstStyle/>
@@ -7251,7 +7304,7 @@
 </file>
 
 <file path=ppt/slides/slide7.xml><?xml version="1.0" encoding="utf-8"?>
-<p:sld xmlns:a="http://schemas.openxmlformats.org/drawingml/2006/main" xmlns:p="http://schemas.openxmlformats.org/presentationml/2006/main" xmlns:r="http://schemas.openxmlformats.org/officeDocument/2006/relationships">
+<p:sld xmlns:a="http://schemas.openxmlformats.org/drawingml/2006/main" xmlns:r="http://schemas.openxmlformats.org/officeDocument/2006/relationships" xmlns:p="http://schemas.openxmlformats.org/presentationml/2006/main">
   <p:cSld>
     <p:bg>
       <p:bgPr>
@@ -7267,7 +7320,14 @@
         <p:cNvGrpSpPr/>
         <p:nvPr/>
       </p:nvGrpSpPr>
-      <p:grpSpPr/>
+      <p:grpSpPr>
+        <a:xfrm>
+          <a:off x="0" y="0"/>
+          <a:ext cx="0" cy="0"/>
+          <a:chOff x="0" y="0"/>
+          <a:chExt cx="0" cy="0"/>
+        </a:xfrm>
+      </p:grpSpPr>
       <p:sp>
         <p:nvSpPr>
           <p:cNvPr id="2" name="TextBox 1"/>
@@ -7285,7 +7345,7 @@
           <a:noFill/>
         </p:spPr>
         <p:txBody>
-          <a:bodyPr wrap="square" anchor="t" lIns="0" rIns="0" tIns="0" bIns="0">
+          <a:bodyPr wrap="square" lIns="0" tIns="0" rIns="0" bIns="0" anchor="t">
             <a:spAutoFit/>
           </a:bodyPr>
           <a:lstStyle/>
@@ -7346,6 +7406,7 @@
           <a:lstStyle/>
           <a:p>
             <a:pPr algn="ctr"/>
+            <a:endParaRPr/>
           </a:p>
         </p:txBody>
       </p:sp>
@@ -7366,7 +7427,7 @@
           <a:noFill/>
         </p:spPr>
         <p:txBody>
-          <a:bodyPr wrap="square" anchor="t" lIns="0" rIns="0" tIns="0" bIns="0">
+          <a:bodyPr wrap="square" lIns="0" tIns="0" rIns="0" bIns="0" anchor="t">
             <a:spAutoFit/>
           </a:bodyPr>
           <a:lstStyle/>
@@ -7401,7 +7462,7 @@
           <a:noFill/>
         </p:spPr>
         <p:txBody>
-          <a:bodyPr wrap="square" anchor="t" lIns="0" rIns="0" tIns="0" bIns="0">
+          <a:bodyPr wrap="square" lIns="0" tIns="0" rIns="0" bIns="0" anchor="t">
             <a:spAutoFit/>
           </a:bodyPr>
           <a:lstStyle/>
@@ -7436,7 +7497,7 @@
           <a:noFill/>
         </p:spPr>
         <p:txBody>
-          <a:bodyPr wrap="square" anchor="t" lIns="0" rIns="0" tIns="0" bIns="0">
+          <a:bodyPr wrap="square" lIns="0" tIns="0" rIns="0" bIns="0" anchor="t">
             <a:spAutoFit/>
           </a:bodyPr>
           <a:lstStyle/>
@@ -7549,6 +7610,7 @@
           <a:lstStyle/>
           <a:p>
             <a:pPr algn="ctr"/>
+            <a:endParaRPr/>
           </a:p>
         </p:txBody>
       </p:sp>
@@ -7569,7 +7631,7 @@
           <a:noFill/>
         </p:spPr>
         <p:txBody>
-          <a:bodyPr wrap="square" anchor="t" lIns="0" rIns="0" tIns="0" bIns="0">
+          <a:bodyPr wrap="square" lIns="0" tIns="0" rIns="0" bIns="0" anchor="t">
             <a:spAutoFit/>
           </a:bodyPr>
           <a:lstStyle/>
@@ -7604,7 +7666,7 @@
           <a:noFill/>
         </p:spPr>
         <p:txBody>
-          <a:bodyPr wrap="square" anchor="t" lIns="0" rIns="0" tIns="0" bIns="0">
+          <a:bodyPr wrap="square" lIns="0" tIns="0" rIns="0" bIns="0" anchor="t">
             <a:spAutoFit/>
           </a:bodyPr>
           <a:lstStyle/>
@@ -7631,7 +7693,7 @@
         <p:spPr>
           <a:xfrm>
             <a:off x="6629400" y="2834640"/>
-            <a:ext cx="4434840" cy="2011680"/>
+            <a:ext cx="4434840" cy="1269578"/>
           </a:xfrm>
           <a:prstGeom prst="rect">
             <a:avLst/>
@@ -7639,7 +7701,7 @@
           <a:noFill/>
         </p:spPr>
         <p:txBody>
-          <a:bodyPr wrap="square" anchor="t" lIns="0" rIns="0" tIns="0" bIns="0">
+          <a:bodyPr wrap="square" lIns="0" tIns="0" rIns="0" bIns="0" anchor="t">
             <a:spAutoFit/>
           </a:bodyPr>
           <a:lstStyle/>
@@ -7698,14 +7760,20 @@
               </a:spcAft>
             </a:pPr>
             <a:r>
-              <a:rPr sz="1250" b="0">
+              <a:rPr lang="en-US" sz="1250" b="0">
                 <a:solidFill>
                   <a:srgbClr val="FFFFFF"/>
                 </a:solidFill>
                 <a:latin typeface="Calibri"/>
               </a:rPr>
-              <a:t>Never the standing sync — items 1, 2, 3, 7 and 9 are why</a:t>
-            </a:r>
+              <a:t>Now the standing sync too — items 1, 2, 3, 7 and 9 are built and live-tested</a:t>
+            </a:r>
+            <a:endParaRPr sz="1250" b="0">
+              <a:solidFill>
+                <a:srgbClr val="FFFFFF"/>
+              </a:solidFill>
+              <a:latin typeface="Calibri"/>
+            </a:endParaRPr>
           </a:p>
         </p:txBody>
       </p:sp>
@@ -7718,7 +7786,7 @@
         <p:spPr>
           <a:xfrm>
             <a:off x="822960" y="5349240"/>
-            <a:ext cx="10607040" cy="1005840"/>
+            <a:ext cx="10607040" cy="646331"/>
           </a:xfrm>
           <a:prstGeom prst="rect">
             <a:avLst/>
@@ -7726,30 +7794,27 @@
           <a:noFill/>
         </p:spPr>
         <p:txBody>
-          <a:bodyPr wrap="square" anchor="t" lIns="0" rIns="0" tIns="0" bIns="0">
+          <a:bodyPr wrap="square" lIns="0" tIns="0" rIns="0" bIns="0" anchor="t">
             <a:spAutoFit/>
           </a:bodyPr>
           <a:lstStyle/>
           <a:p>
             <a:pPr algn="l"/>
             <a:r>
-              <a:rPr sz="1400" b="0">
+              <a:rPr lang="en-US" sz="1400" b="0">
                 <a:solidFill>
                   <a:srgbClr val="CADCFC"/>
                 </a:solidFill>
                 <a:latin typeface="Calibri"/>
               </a:rPr>
-              <a:t>If a requirement ever forces the bypass into production, the ten features are the work plan — </a:t>
-            </a:r>
-            <a:r>
-              <a:rPr sz="1400" b="1">
-                <a:solidFill>
-                  <a:srgbClr val="FFFFFF"/>
-                </a:solidFill>
-                <a:latin typeface="Calibri"/>
-              </a:rPr>
-              <a:t>in that order.</a:t>
-            </a:r>
+              <a:t>That requirement arrived, and the ten features were the work plan. Eight are built and were exercised at 111,800 items: scheduling, delete detection, hashing, duplicate detection, identity mapping, retry and throttling, checkpointing and quota-efficient updates. Admin-centre integration is replaced by an operations dashboard rather than rebuilt; one controlled egress is a firewall decision this repository can only point at.</a:t>
+            </a:r>
+            <a:endParaRPr sz="1400" b="1">
+              <a:solidFill>
+                <a:srgbClr val="FFFFFF"/>
+              </a:solidFill>
+              <a:latin typeface="Calibri"/>
+            </a:endParaRPr>
           </a:p>
         </p:txBody>
       </p:sp>
